--- a/Teaching/Chemistry/Labs/FCC Chem 3A Expt 10a Types of Reactions.pptx
+++ b/Teaching/Chemistry/Labs/FCC Chem 3A Expt 10a Types of Reactions.pptx
@@ -5,7 +5,7 @@
     <p:sldMasterId id="2147483803" r:id="rId1"/>
   </p:sldMasterIdLst>
   <p:notesMasterIdLst>
-    <p:notesMasterId r:id="rId19"/>
+    <p:notesMasterId r:id="rId25"/>
   </p:notesMasterIdLst>
   <p:sldIdLst>
     <p:sldId id="608" r:id="rId2"/>
@@ -25,6 +25,12 @@
     <p:sldId id="632" r:id="rId16"/>
     <p:sldId id="621" r:id="rId17"/>
     <p:sldId id="612" r:id="rId18"/>
+    <p:sldId id="634" r:id="rId19"/>
+    <p:sldId id="635" r:id="rId20"/>
+    <p:sldId id="636" r:id="rId21"/>
+    <p:sldId id="637" r:id="rId22"/>
+    <p:sldId id="638" r:id="rId23"/>
+    <p:sldId id="639" r:id="rId24"/>
   </p:sldIdLst>
   <p:sldSz cx="9144000" cy="6858000" type="screen4x3"/>
   <p:notesSz cx="7315200" cy="9601200"/>
@@ -12547,6 +12553,126 @@
 </p:sld>
 </file>
 
+<file path=ppt/slides/slide18.xml><?xml version="1.0" encoding="utf-8"?>
+<p:sld xmlns:a="http://schemas.openxmlformats.org/drawingml/2006/main" xmlns:r="http://schemas.openxmlformats.org/officeDocument/2006/relationships" xmlns:p="http://schemas.openxmlformats.org/presentationml/2006/main">
+  <p:cSld>
+    <p:spTree>
+      <p:nvGrpSpPr>
+        <p:cNvPr id="1" name=""/>
+        <p:cNvGrpSpPr/>
+        <p:nvPr/>
+      </p:nvGrpSpPr>
+      <p:grpSpPr>
+        <a:xfrm>
+          <a:off x="0" y="0"/>
+          <a:ext cx="0" cy="0"/>
+          <a:chOff x="0" y="0"/>
+          <a:chExt cx="0" cy="0"/>
+        </a:xfrm>
+      </p:grpSpPr>
+      <p:pic>
+        <p:nvPicPr>
+          <p:cNvPr id="7" name="Picture 6">
+            <a:extLst>
+              <a:ext uri="{FF2B5EF4-FFF2-40B4-BE49-F238E27FC236}">
+                <a16:creationId xmlns:a16="http://schemas.microsoft.com/office/drawing/2014/main" id="{7AAFA8E4-BF2A-26CB-6EEE-A4BE4A2FCCD3}"/>
+              </a:ext>
+            </a:extLst>
+          </p:cNvPr>
+          <p:cNvPicPr>
+            <a:picLocks noChangeAspect="1"/>
+          </p:cNvPicPr>
+          <p:nvPr/>
+        </p:nvPicPr>
+        <p:blipFill>
+          <a:blip r:embed="rId2"/>
+          <a:stretch>
+            <a:fillRect/>
+          </a:stretch>
+        </p:blipFill>
+        <p:spPr>
+          <a:xfrm>
+            <a:off x="1519237" y="0"/>
+            <a:ext cx="6105525" cy="6858000"/>
+          </a:xfrm>
+          <a:prstGeom prst="rect">
+            <a:avLst/>
+          </a:prstGeom>
+        </p:spPr>
+      </p:pic>
+    </p:spTree>
+    <p:extLst>
+      <p:ext uri="{BB962C8B-B14F-4D97-AF65-F5344CB8AC3E}">
+        <p14:creationId xmlns:p14="http://schemas.microsoft.com/office/powerpoint/2010/main" val="1525568601"/>
+      </p:ext>
+    </p:extLst>
+  </p:cSld>
+  <p:clrMapOvr>
+    <a:masterClrMapping/>
+  </p:clrMapOvr>
+</p:sld>
+</file>
+
+<file path=ppt/slides/slide19.xml><?xml version="1.0" encoding="utf-8"?>
+<p:sld xmlns:a="http://schemas.openxmlformats.org/drawingml/2006/main" xmlns:r="http://schemas.openxmlformats.org/officeDocument/2006/relationships" xmlns:p="http://schemas.openxmlformats.org/presentationml/2006/main">
+  <p:cSld>
+    <p:spTree>
+      <p:nvGrpSpPr>
+        <p:cNvPr id="1" name=""/>
+        <p:cNvGrpSpPr/>
+        <p:nvPr/>
+      </p:nvGrpSpPr>
+      <p:grpSpPr>
+        <a:xfrm>
+          <a:off x="0" y="0"/>
+          <a:ext cx="0" cy="0"/>
+          <a:chOff x="0" y="0"/>
+          <a:chExt cx="0" cy="0"/>
+        </a:xfrm>
+      </p:grpSpPr>
+      <p:pic>
+        <p:nvPicPr>
+          <p:cNvPr id="3" name="Picture 2">
+            <a:extLst>
+              <a:ext uri="{FF2B5EF4-FFF2-40B4-BE49-F238E27FC236}">
+                <a16:creationId xmlns:a16="http://schemas.microsoft.com/office/drawing/2014/main" id="{CD1DCEC1-78BE-BD7E-F0D3-F92A40B9C542}"/>
+              </a:ext>
+            </a:extLst>
+          </p:cNvPr>
+          <p:cNvPicPr>
+            <a:picLocks noChangeAspect="1"/>
+          </p:cNvPicPr>
+          <p:nvPr/>
+        </p:nvPicPr>
+        <p:blipFill>
+          <a:blip r:embed="rId2"/>
+          <a:stretch>
+            <a:fillRect/>
+          </a:stretch>
+        </p:blipFill>
+        <p:spPr>
+          <a:xfrm>
+            <a:off x="2068922" y="0"/>
+            <a:ext cx="5006155" cy="6858000"/>
+          </a:xfrm>
+          <a:prstGeom prst="rect">
+            <a:avLst/>
+          </a:prstGeom>
+        </p:spPr>
+      </p:pic>
+    </p:spTree>
+    <p:extLst>
+      <p:ext uri="{BB962C8B-B14F-4D97-AF65-F5344CB8AC3E}">
+        <p14:creationId xmlns:p14="http://schemas.microsoft.com/office/powerpoint/2010/main" val="3492759680"/>
+      </p:ext>
+    </p:extLst>
+  </p:cSld>
+  <p:clrMapOvr>
+    <a:masterClrMapping/>
+  </p:clrMapOvr>
+</p:sld>
+</file>
+
 <file path=ppt/slides/slide2.xml><?xml version="1.0" encoding="utf-8"?>
 <p:sld xmlns:a="http://schemas.openxmlformats.org/drawingml/2006/main" xmlns:r="http://schemas.openxmlformats.org/officeDocument/2006/relationships" xmlns:p="http://schemas.openxmlformats.org/presentationml/2006/main">
   <p:cSld>
@@ -12679,6 +12805,246 @@
     <p:extLst>
       <p:ext uri="{BB962C8B-B14F-4D97-AF65-F5344CB8AC3E}">
         <p14:creationId xmlns:p14="http://schemas.microsoft.com/office/powerpoint/2010/main" val="114929422"/>
+      </p:ext>
+    </p:extLst>
+  </p:cSld>
+  <p:clrMapOvr>
+    <a:masterClrMapping/>
+  </p:clrMapOvr>
+</p:sld>
+</file>
+
+<file path=ppt/slides/slide20.xml><?xml version="1.0" encoding="utf-8"?>
+<p:sld xmlns:a="http://schemas.openxmlformats.org/drawingml/2006/main" xmlns:r="http://schemas.openxmlformats.org/officeDocument/2006/relationships" xmlns:p="http://schemas.openxmlformats.org/presentationml/2006/main">
+  <p:cSld>
+    <p:spTree>
+      <p:nvGrpSpPr>
+        <p:cNvPr id="1" name=""/>
+        <p:cNvGrpSpPr/>
+        <p:nvPr/>
+      </p:nvGrpSpPr>
+      <p:grpSpPr>
+        <a:xfrm>
+          <a:off x="0" y="0"/>
+          <a:ext cx="0" cy="0"/>
+          <a:chOff x="0" y="0"/>
+          <a:chExt cx="0" cy="0"/>
+        </a:xfrm>
+      </p:grpSpPr>
+      <p:pic>
+        <p:nvPicPr>
+          <p:cNvPr id="3" name="Picture 2">
+            <a:extLst>
+              <a:ext uri="{FF2B5EF4-FFF2-40B4-BE49-F238E27FC236}">
+                <a16:creationId xmlns:a16="http://schemas.microsoft.com/office/drawing/2014/main" id="{5115920B-35AB-8E4A-52CB-2C863739F4AB}"/>
+              </a:ext>
+            </a:extLst>
+          </p:cNvPr>
+          <p:cNvPicPr>
+            <a:picLocks noChangeAspect="1"/>
+          </p:cNvPicPr>
+          <p:nvPr/>
+        </p:nvPicPr>
+        <p:blipFill>
+          <a:blip r:embed="rId2"/>
+          <a:stretch>
+            <a:fillRect/>
+          </a:stretch>
+        </p:blipFill>
+        <p:spPr>
+          <a:xfrm>
+            <a:off x="1883738" y="0"/>
+            <a:ext cx="5376524" cy="6858000"/>
+          </a:xfrm>
+          <a:prstGeom prst="rect">
+            <a:avLst/>
+          </a:prstGeom>
+        </p:spPr>
+      </p:pic>
+    </p:spTree>
+    <p:extLst>
+      <p:ext uri="{BB962C8B-B14F-4D97-AF65-F5344CB8AC3E}">
+        <p14:creationId xmlns:p14="http://schemas.microsoft.com/office/powerpoint/2010/main" val="1023201208"/>
+      </p:ext>
+    </p:extLst>
+  </p:cSld>
+  <p:clrMapOvr>
+    <a:masterClrMapping/>
+  </p:clrMapOvr>
+</p:sld>
+</file>
+
+<file path=ppt/slides/slide21.xml><?xml version="1.0" encoding="utf-8"?>
+<p:sld xmlns:a="http://schemas.openxmlformats.org/drawingml/2006/main" xmlns:r="http://schemas.openxmlformats.org/officeDocument/2006/relationships" xmlns:p="http://schemas.openxmlformats.org/presentationml/2006/main">
+  <p:cSld>
+    <p:spTree>
+      <p:nvGrpSpPr>
+        <p:cNvPr id="1" name=""/>
+        <p:cNvGrpSpPr/>
+        <p:nvPr/>
+      </p:nvGrpSpPr>
+      <p:grpSpPr>
+        <a:xfrm>
+          <a:off x="0" y="0"/>
+          <a:ext cx="0" cy="0"/>
+          <a:chOff x="0" y="0"/>
+          <a:chExt cx="0" cy="0"/>
+        </a:xfrm>
+      </p:grpSpPr>
+      <p:pic>
+        <p:nvPicPr>
+          <p:cNvPr id="3" name="Picture 2">
+            <a:extLst>
+              <a:ext uri="{FF2B5EF4-FFF2-40B4-BE49-F238E27FC236}">
+                <a16:creationId xmlns:a16="http://schemas.microsoft.com/office/drawing/2014/main" id="{DE59D436-26E5-FE25-572C-4390326755FB}"/>
+              </a:ext>
+            </a:extLst>
+          </p:cNvPr>
+          <p:cNvPicPr>
+            <a:picLocks noChangeAspect="1"/>
+          </p:cNvPicPr>
+          <p:nvPr/>
+        </p:nvPicPr>
+        <p:blipFill>
+          <a:blip r:embed="rId2"/>
+          <a:stretch>
+            <a:fillRect/>
+          </a:stretch>
+        </p:blipFill>
+        <p:spPr>
+          <a:xfrm>
+            <a:off x="2076776" y="0"/>
+            <a:ext cx="4990448" cy="6858000"/>
+          </a:xfrm>
+          <a:prstGeom prst="rect">
+            <a:avLst/>
+          </a:prstGeom>
+        </p:spPr>
+      </p:pic>
+    </p:spTree>
+    <p:extLst>
+      <p:ext uri="{BB962C8B-B14F-4D97-AF65-F5344CB8AC3E}">
+        <p14:creationId xmlns:p14="http://schemas.microsoft.com/office/powerpoint/2010/main" val="2609157590"/>
+      </p:ext>
+    </p:extLst>
+  </p:cSld>
+  <p:clrMapOvr>
+    <a:masterClrMapping/>
+  </p:clrMapOvr>
+</p:sld>
+</file>
+
+<file path=ppt/slides/slide22.xml><?xml version="1.0" encoding="utf-8"?>
+<p:sld xmlns:a="http://schemas.openxmlformats.org/drawingml/2006/main" xmlns:r="http://schemas.openxmlformats.org/officeDocument/2006/relationships" xmlns:p="http://schemas.openxmlformats.org/presentationml/2006/main">
+  <p:cSld>
+    <p:spTree>
+      <p:nvGrpSpPr>
+        <p:cNvPr id="1" name=""/>
+        <p:cNvGrpSpPr/>
+        <p:nvPr/>
+      </p:nvGrpSpPr>
+      <p:grpSpPr>
+        <a:xfrm>
+          <a:off x="0" y="0"/>
+          <a:ext cx="0" cy="0"/>
+          <a:chOff x="0" y="0"/>
+          <a:chExt cx="0" cy="0"/>
+        </a:xfrm>
+      </p:grpSpPr>
+      <p:pic>
+        <p:nvPicPr>
+          <p:cNvPr id="3" name="Picture 2">
+            <a:extLst>
+              <a:ext uri="{FF2B5EF4-FFF2-40B4-BE49-F238E27FC236}">
+                <a16:creationId xmlns:a16="http://schemas.microsoft.com/office/drawing/2014/main" id="{184B46C5-ADDC-7BF8-76FF-212228F0FB47}"/>
+              </a:ext>
+            </a:extLst>
+          </p:cNvPr>
+          <p:cNvPicPr>
+            <a:picLocks noChangeAspect="1"/>
+          </p:cNvPicPr>
+          <p:nvPr/>
+        </p:nvPicPr>
+        <p:blipFill>
+          <a:blip r:embed="rId2"/>
+          <a:stretch>
+            <a:fillRect/>
+          </a:stretch>
+        </p:blipFill>
+        <p:spPr>
+          <a:xfrm>
+            <a:off x="2098420" y="0"/>
+            <a:ext cx="4947160" cy="6858000"/>
+          </a:xfrm>
+          <a:prstGeom prst="rect">
+            <a:avLst/>
+          </a:prstGeom>
+        </p:spPr>
+      </p:pic>
+    </p:spTree>
+    <p:extLst>
+      <p:ext uri="{BB962C8B-B14F-4D97-AF65-F5344CB8AC3E}">
+        <p14:creationId xmlns:p14="http://schemas.microsoft.com/office/powerpoint/2010/main" val="2250874435"/>
+      </p:ext>
+    </p:extLst>
+  </p:cSld>
+  <p:clrMapOvr>
+    <a:masterClrMapping/>
+  </p:clrMapOvr>
+</p:sld>
+</file>
+
+<file path=ppt/slides/slide23.xml><?xml version="1.0" encoding="utf-8"?>
+<p:sld xmlns:a="http://schemas.openxmlformats.org/drawingml/2006/main" xmlns:r="http://schemas.openxmlformats.org/officeDocument/2006/relationships" xmlns:p="http://schemas.openxmlformats.org/presentationml/2006/main">
+  <p:cSld>
+    <p:spTree>
+      <p:nvGrpSpPr>
+        <p:cNvPr id="1" name=""/>
+        <p:cNvGrpSpPr/>
+        <p:nvPr/>
+      </p:nvGrpSpPr>
+      <p:grpSpPr>
+        <a:xfrm>
+          <a:off x="0" y="0"/>
+          <a:ext cx="0" cy="0"/>
+          <a:chOff x="0" y="0"/>
+          <a:chExt cx="0" cy="0"/>
+        </a:xfrm>
+      </p:grpSpPr>
+      <p:pic>
+        <p:nvPicPr>
+          <p:cNvPr id="3" name="Picture 2">
+            <a:extLst>
+              <a:ext uri="{FF2B5EF4-FFF2-40B4-BE49-F238E27FC236}">
+                <a16:creationId xmlns:a16="http://schemas.microsoft.com/office/drawing/2014/main" id="{8F48C5EB-6C08-FC01-93E9-28FC3F8B7A6B}"/>
+              </a:ext>
+            </a:extLst>
+          </p:cNvPr>
+          <p:cNvPicPr>
+            <a:picLocks noChangeAspect="1"/>
+          </p:cNvPicPr>
+          <p:nvPr/>
+        </p:nvPicPr>
+        <p:blipFill>
+          <a:blip r:embed="rId2"/>
+          <a:stretch>
+            <a:fillRect/>
+          </a:stretch>
+        </p:blipFill>
+        <p:spPr>
+          <a:xfrm>
+            <a:off x="1024286" y="0"/>
+            <a:ext cx="7095428" cy="6858000"/>
+          </a:xfrm>
+          <a:prstGeom prst="rect">
+            <a:avLst/>
+          </a:prstGeom>
+        </p:spPr>
+      </p:pic>
+    </p:spTree>
+    <p:extLst>
+      <p:ext uri="{BB962C8B-B14F-4D97-AF65-F5344CB8AC3E}">
+        <p14:creationId xmlns:p14="http://schemas.microsoft.com/office/powerpoint/2010/main" val="296621307"/>
       </p:ext>
     </p:extLst>
   </p:cSld>
